--- a/system-design-101/vi/lessons/sd-01-048/slides/sd-01-048.pptx
+++ b/system-design-101/vi/lessons/sd-01-048/slides/sd-01-048.pptx
@@ -31,12 +31,8 @@
       <p:regular r:id="rId17"/>
     </p:embeddedFont>
     <p:embeddedFont>
-      <p:font typeface="Roboto Mono"/>
-      <p:bold r:id="rId19"/>
-    </p:embeddedFont>
-    <p:embeddedFont>
       <p:font typeface="Be Vietnam Pro SemiBold"/>
-      <p:regular r:id="rId20"/>
+      <p:regular r:id="rId19"/>
     </p:embeddedFont>
   </p:embeddedFontLst>
   <p:defaultTextStyle>
@@ -2900,15 +2896,26 @@
               <a:buNone/>
             </a:pPr>
             <a:r>
-              <a:rPr lang="en-US" sz="3300" b="1" dirty="0" spc="5" kern="0">
+              <a:rPr lang="en-US" sz="3300" b="1" dirty="0" spc="1" kern="0">
                 <a:solidFill>
                   <a:srgbClr val="14161C"/>
                 </a:solidFill>
-                <a:latin typeface="Roboto Mono" pitchFamily="34" charset="0"/>
-                <a:ea typeface="Roboto Mono" pitchFamily="34" charset="-122"/>
-                <a:cs typeface="Roboto Mono" pitchFamily="34" charset="-120"/>
-              </a:rPr>
-              <a:t>GET /seeds/7</a:t>
+                <a:latin typeface="Be Vietnam Pro" pitchFamily="34" charset="0"/>
+                <a:ea typeface="Be Vietnam Pro" pitchFamily="34" charset="-122"/>
+                <a:cs typeface="Be Vietnam Pro" pitchFamily="34" charset="-120"/>
+              </a:rPr>
+              <a:t>GET</a:t>
+            </a:r>
+            <a:r>
+              <a:rPr lang="en-US" sz="3300" b="1" dirty="0" spc="17" kern="0">
+                <a:solidFill>
+                  <a:srgbClr val="14161C"/>
+                </a:solidFill>
+                <a:latin typeface="Be Vietnam Pro" pitchFamily="34" charset="0"/>
+                <a:ea typeface="Be Vietnam Pro" pitchFamily="34" charset="-122"/>
+                <a:cs typeface="Be Vietnam Pro" pitchFamily="34" charset="-120"/>
+              </a:rPr>
+              <a:t> /seeds/7</a:t>
             </a:r>
             <a:endParaRPr lang="en-US" sz="3300" dirty="0"/>
           </a:p>
@@ -4427,9 +4434,9 @@
                 <a:solidFill>
                   <a:srgbClr val="7C93FF"/>
                 </a:solidFill>
-                <a:latin typeface="Roboto Mono" pitchFamily="34" charset="0"/>
-                <a:ea typeface="Roboto Mono" pitchFamily="34" charset="-122"/>
-                <a:cs typeface="Roboto Mono" pitchFamily="34" charset="-120"/>
+                <a:latin typeface="Be Vietnam Pro" pitchFamily="34" charset="0"/>
+                <a:ea typeface="Be Vietnam Pro" pitchFamily="34" charset="-122"/>
+                <a:cs typeface="Be Vietnam Pro" pitchFamily="34" charset="-120"/>
               </a:rPr>
               <a:t>GET /seeds/7 →</a:t>
             </a:r>
@@ -7234,13 +7241,13 @@
               <a:buNone/>
             </a:pPr>
             <a:r>
-              <a:rPr lang="en-US" sz="2850" b="1" dirty="0" spc="-2" kern="0">
+              <a:rPr lang="en-US" sz="2850" b="1" dirty="0" spc="-15" kern="0">
                 <a:solidFill>
                   <a:srgbClr val="0F766E"/>
                 </a:solidFill>
-                <a:latin typeface="Roboto Mono" pitchFamily="34" charset="0"/>
-                <a:ea typeface="Roboto Mono" pitchFamily="34" charset="-122"/>
-                <a:cs typeface="Roboto Mono" pitchFamily="34" charset="-120"/>
+                <a:latin typeface="Be Vietnam Pro" pitchFamily="34" charset="0"/>
+                <a:ea typeface="Be Vietnam Pro" pitchFamily="34" charset="-122"/>
+                <a:cs typeface="Be Vietnam Pro" pitchFamily="34" charset="-120"/>
               </a:rPr>
               <a:t>no-store</a:t>
             </a:r>
@@ -7376,9 +7383,9 @@
                 <a:solidFill>
                   <a:srgbClr val="14161C"/>
                 </a:solidFill>
-                <a:latin typeface="Roboto Mono" pitchFamily="34" charset="0"/>
-                <a:ea typeface="Roboto Mono" pitchFamily="34" charset="-122"/>
-                <a:cs typeface="Roboto Mono" pitchFamily="34" charset="-120"/>
+                <a:latin typeface="Be Vietnam Pro" pitchFamily="34" charset="0"/>
+                <a:ea typeface="Be Vietnam Pro" pitchFamily="34" charset="-122"/>
+                <a:cs typeface="Be Vietnam Pro" pitchFamily="34" charset="-120"/>
               </a:rPr>
               <a:t>no-cache</a:t>
             </a:r>
